--- a/Day17-DevOps-and-Cloud-Fundamentals/Day17_Deck_DevOps_and_Cloud_Fundamentals.pptx
+++ b/Day17-DevOps-and-Cloud-Fundamentals/Day17_Deck_DevOps_and_Cloud_Fundamentals.pptx
@@ -5328,13 +5328,13 @@
           <a:noFill/>
         </p:spPr>
         <p:txBody>
-          <a:bodyPr wrap="square" lIns="0" rIns="0" tIns="0" bIns="0" anchor="t">
-            <a:spAutoFit/>
-          </a:bodyPr>
-          <a:lstStyle/>
-          <a:p>
-            <a:r>
-              <a:rPr sz="879" b="0" i="0">
+          <a:bodyPr wrap="none" lIns="0" rIns="0" tIns="0" bIns="0" anchor="t">
+            <a:spAutoFit/>
+          </a:bodyPr>
+          <a:lstStyle/>
+          <a:p>
+            <a:r>
+              <a:rPr sz="773" b="0" i="0">
                 <a:solidFill>
                   <a:srgbClr val="EAF7F5"/>
                 </a:solidFill>
@@ -5345,7 +5345,7 @@
           </a:p>
           <a:p>
             <a:r>
-              <a:rPr sz="879" b="0" i="0">
+              <a:rPr sz="773" b="0" i="0">
                 <a:solidFill>
                   <a:srgbClr val="EAF7F5"/>
                 </a:solidFill>
@@ -5356,7 +5356,7 @@
           </a:p>
           <a:p>
             <a:r>
-              <a:rPr sz="879" b="0" i="0">
+              <a:rPr sz="773" b="0" i="0">
                 <a:solidFill>
                   <a:srgbClr val="EAF7F5"/>
                 </a:solidFill>
@@ -5367,7 +5367,7 @@
           </a:p>
           <a:p>
             <a:r>
-              <a:rPr sz="879" b="0" i="0">
+              <a:rPr sz="773" b="0" i="0">
                 <a:solidFill>
                   <a:srgbClr val="EAF7F5"/>
                 </a:solidFill>
@@ -5378,7 +5378,7 @@
           </a:p>
           <a:p>
             <a:r>
-              <a:rPr sz="879" b="0" i="0">
+              <a:rPr sz="773" b="0" i="0">
                 <a:solidFill>
                   <a:srgbClr val="EAF7F5"/>
                 </a:solidFill>
@@ -5389,7 +5389,7 @@
           </a:p>
           <a:p>
             <a:r>
-              <a:rPr sz="879" b="0" i="0">
+              <a:rPr sz="773" b="0" i="0">
                 <a:solidFill>
                   <a:srgbClr val="EAF7F5"/>
                 </a:solidFill>
@@ -5400,7 +5400,7 @@
           </a:p>
           <a:p>
             <a:r>
-              <a:rPr sz="879" b="0" i="0">
+              <a:rPr sz="773" b="0" i="0">
                 <a:solidFill>
                   <a:srgbClr val="EAF7F5"/>
                 </a:solidFill>
@@ -5411,7 +5411,7 @@
           </a:p>
           <a:p>
             <a:r>
-              <a:rPr sz="879" b="0" i="0">
+              <a:rPr sz="773" b="0" i="0">
                 <a:solidFill>
                   <a:srgbClr val="EAF7F5"/>
                 </a:solidFill>
@@ -5422,7 +5422,7 @@
           </a:p>
           <a:p>
             <a:r>
-              <a:rPr sz="879" b="0" i="0">
+              <a:rPr sz="773" b="0" i="0">
                 <a:solidFill>
                   <a:srgbClr val="EAF7F5"/>
                 </a:solidFill>
@@ -13260,13 +13260,13 @@
           <a:noFill/>
         </p:spPr>
         <p:txBody>
-          <a:bodyPr wrap="square" lIns="0" rIns="0" tIns="0" bIns="0" anchor="t">
-            <a:spAutoFit/>
-          </a:bodyPr>
-          <a:lstStyle/>
-          <a:p>
-            <a:r>
-              <a:rPr sz="927" b="0" i="0">
+          <a:bodyPr wrap="none" lIns="0" rIns="0" tIns="0" bIns="0" anchor="t">
+            <a:spAutoFit/>
+          </a:bodyPr>
+          <a:lstStyle/>
+          <a:p>
+            <a:r>
+              <a:rPr sz="816" b="0" i="0">
                 <a:solidFill>
                   <a:srgbClr val="EAF7F5"/>
                 </a:solidFill>
@@ -13277,7 +13277,7 @@
           </a:p>
           <a:p>
             <a:r>
-              <a:rPr sz="927" b="0" i="0">
+              <a:rPr sz="816" b="0" i="0">
                 <a:solidFill>
                   <a:srgbClr val="EAF7F5"/>
                 </a:solidFill>
@@ -13288,7 +13288,7 @@
           </a:p>
           <a:p>
             <a:r>
-              <a:rPr sz="927" b="0" i="0">
+              <a:rPr sz="816" b="0" i="0">
                 <a:solidFill>
                   <a:srgbClr val="EAF7F5"/>
                 </a:solidFill>
@@ -13299,7 +13299,7 @@
           </a:p>
           <a:p>
             <a:r>
-              <a:rPr sz="927" b="0" i="0">
+              <a:rPr sz="816" b="0" i="0">
                 <a:solidFill>
                   <a:srgbClr val="EAF7F5"/>
                 </a:solidFill>
@@ -13310,7 +13310,7 @@
           </a:p>
           <a:p>
             <a:r>
-              <a:rPr sz="927" b="0" i="0">
+              <a:rPr sz="816" b="0" i="0">
                 <a:solidFill>
                   <a:srgbClr val="EAF7F5"/>
                 </a:solidFill>
@@ -13321,7 +13321,7 @@
           </a:p>
           <a:p>
             <a:r>
-              <a:rPr sz="927" b="0" i="0">
+              <a:rPr sz="816" b="0" i="0">
                 <a:solidFill>
                   <a:srgbClr val="EAF7F5"/>
                 </a:solidFill>
@@ -13332,7 +13332,7 @@
           </a:p>
           <a:p>
             <a:r>
-              <a:rPr sz="927" b="0" i="0">
+              <a:rPr sz="816" b="0" i="0">
                 <a:solidFill>
                   <a:srgbClr val="EAF7F5"/>
                 </a:solidFill>
@@ -13343,7 +13343,7 @@
           </a:p>
           <a:p>
             <a:r>
-              <a:rPr sz="927" b="0" i="0">
+              <a:rPr sz="816" b="0" i="0">
                 <a:solidFill>
                   <a:srgbClr val="EAF7F5"/>
                 </a:solidFill>
@@ -13354,7 +13354,7 @@
           </a:p>
           <a:p>
             <a:r>
-              <a:rPr sz="927" b="0" i="0">
+              <a:rPr sz="816" b="0" i="0">
                 <a:solidFill>
                   <a:srgbClr val="EAF7F5"/>
                 </a:solidFill>
@@ -13365,7 +13365,7 @@
           </a:p>
           <a:p>
             <a:r>
-              <a:rPr sz="927" b="0" i="0">
+              <a:rPr sz="816" b="0" i="0">
                 <a:solidFill>
                   <a:srgbClr val="EAF7F5"/>
                 </a:solidFill>
@@ -13376,7 +13376,7 @@
           </a:p>
           <a:p>
             <a:r>
-              <a:rPr sz="927" b="0" i="0">
+              <a:rPr sz="816" b="0" i="0">
                 <a:solidFill>
                   <a:srgbClr val="EAF7F5"/>
                 </a:solidFill>
@@ -13387,7 +13387,7 @@
           </a:p>
           <a:p>
             <a:r>
-              <a:rPr sz="927" b="0" i="0">
+              <a:rPr sz="816" b="0" i="0">
                 <a:solidFill>
                   <a:srgbClr val="EAF7F5"/>
                 </a:solidFill>
@@ -13398,7 +13398,7 @@
           </a:p>
           <a:p>
             <a:r>
-              <a:rPr sz="927" b="0" i="0">
+              <a:rPr sz="816" b="0" i="0">
                 <a:solidFill>
                   <a:srgbClr val="EAF7F5"/>
                 </a:solidFill>
@@ -13409,7 +13409,7 @@
           </a:p>
           <a:p>
             <a:r>
-              <a:rPr sz="927" b="0" i="0">
+              <a:rPr sz="816" b="0" i="0">
                 <a:solidFill>
                   <a:srgbClr val="EAF7F5"/>
                 </a:solidFill>
@@ -13420,7 +13420,7 @@
           </a:p>
           <a:p>
             <a:r>
-              <a:rPr sz="927" b="0" i="0">
+              <a:rPr sz="816" b="0" i="0">
                 <a:solidFill>
                   <a:srgbClr val="EAF7F5"/>
                 </a:solidFill>
@@ -13431,7 +13431,7 @@
           </a:p>
           <a:p>
             <a:r>
-              <a:rPr sz="927" b="0" i="0">
+              <a:rPr sz="816" b="0" i="0">
                 <a:solidFill>
                   <a:srgbClr val="EAF7F5"/>
                 </a:solidFill>
@@ -13442,7 +13442,7 @@
           </a:p>
           <a:p>
             <a:r>
-              <a:rPr sz="927" b="0" i="0">
+              <a:rPr sz="816" b="0" i="0">
                 <a:solidFill>
                   <a:srgbClr val="EAF7F5"/>
                 </a:solidFill>
@@ -13453,7 +13453,7 @@
           </a:p>
           <a:p>
             <a:r>
-              <a:rPr sz="927" b="0" i="0">
+              <a:rPr sz="816" b="0" i="0">
                 <a:solidFill>
                   <a:srgbClr val="EAF7F5"/>
                 </a:solidFill>
@@ -13464,7 +13464,7 @@
           </a:p>
           <a:p>
             <a:r>
-              <a:rPr sz="927" b="0" i="0">
+              <a:rPr sz="816" b="0" i="0">
                 <a:solidFill>
                   <a:srgbClr val="EAF7F5"/>
                 </a:solidFill>
